--- a/.lessons/58 Backend Product And Related Features/25 Product Variant Item- Working with create feature/1.pptx
+++ b/.lessons/58 Backend Product And Related Features/25 Product Variant Item- Working with create feature/1.pptx
@@ -7,7 +7,13 @@
   <p:sldIdLst>
     <p:sldId id="413" r:id="rId2"/>
     <p:sldId id="414" r:id="rId3"/>
-    <p:sldId id="400" r:id="rId4"/>
+    <p:sldId id="415" r:id="rId4"/>
+    <p:sldId id="416" r:id="rId5"/>
+    <p:sldId id="400" r:id="rId6"/>
+    <p:sldId id="417" r:id="rId7"/>
+    <p:sldId id="421" r:id="rId8"/>
+    <p:sldId id="420" r:id="rId9"/>
+    <p:sldId id="419" r:id="rId10"/>
   </p:sldIdLst>
   <p:sldSz cx="12192000" cy="6858000"/>
   <p:notesSz cx="6858000" cy="9144000"/>
@@ -261,7 +267,7 @@
           <a:p>
             <a:fld id="{3E102D2E-813C-461C-9963-687A650C48C0}" type="datetimeFigureOut">
               <a:rPr lang="en-US" smtClean="0"/>
-              <a:t>6/26/2025</a:t>
+              <a:t>10/9/2025</a:t>
             </a:fld>
             <a:endParaRPr lang="en-US"/>
           </a:p>
@@ -459,7 +465,7 @@
           <a:p>
             <a:fld id="{3E102D2E-813C-461C-9963-687A650C48C0}" type="datetimeFigureOut">
               <a:rPr lang="en-US" smtClean="0"/>
-              <a:t>6/26/2025</a:t>
+              <a:t>10/9/2025</a:t>
             </a:fld>
             <a:endParaRPr lang="en-US"/>
           </a:p>
@@ -667,7 +673,7 @@
           <a:p>
             <a:fld id="{3E102D2E-813C-461C-9963-687A650C48C0}" type="datetimeFigureOut">
               <a:rPr lang="en-US" smtClean="0"/>
-              <a:t>6/26/2025</a:t>
+              <a:t>10/9/2025</a:t>
             </a:fld>
             <a:endParaRPr lang="en-US"/>
           </a:p>
@@ -865,7 +871,7 @@
           <a:p>
             <a:fld id="{3E102D2E-813C-461C-9963-687A650C48C0}" type="datetimeFigureOut">
               <a:rPr lang="en-US" smtClean="0"/>
-              <a:t>6/26/2025</a:t>
+              <a:t>10/9/2025</a:t>
             </a:fld>
             <a:endParaRPr lang="en-US"/>
           </a:p>
@@ -1140,7 +1146,7 @@
           <a:p>
             <a:fld id="{3E102D2E-813C-461C-9963-687A650C48C0}" type="datetimeFigureOut">
               <a:rPr lang="en-US" smtClean="0"/>
-              <a:t>6/26/2025</a:t>
+              <a:t>10/9/2025</a:t>
             </a:fld>
             <a:endParaRPr lang="en-US"/>
           </a:p>
@@ -1405,7 +1411,7 @@
           <a:p>
             <a:fld id="{3E102D2E-813C-461C-9963-687A650C48C0}" type="datetimeFigureOut">
               <a:rPr lang="en-US" smtClean="0"/>
-              <a:t>6/26/2025</a:t>
+              <a:t>10/9/2025</a:t>
             </a:fld>
             <a:endParaRPr lang="en-US"/>
           </a:p>
@@ -1817,7 +1823,7 @@
           <a:p>
             <a:fld id="{3E102D2E-813C-461C-9963-687A650C48C0}" type="datetimeFigureOut">
               <a:rPr lang="en-US" smtClean="0"/>
-              <a:t>6/26/2025</a:t>
+              <a:t>10/9/2025</a:t>
             </a:fld>
             <a:endParaRPr lang="en-US"/>
           </a:p>
@@ -1958,7 +1964,7 @@
           <a:p>
             <a:fld id="{3E102D2E-813C-461C-9963-687A650C48C0}" type="datetimeFigureOut">
               <a:rPr lang="en-US" smtClean="0"/>
-              <a:t>6/26/2025</a:t>
+              <a:t>10/9/2025</a:t>
             </a:fld>
             <a:endParaRPr lang="en-US"/>
           </a:p>
@@ -2071,7 +2077,7 @@
           <a:p>
             <a:fld id="{3E102D2E-813C-461C-9963-687A650C48C0}" type="datetimeFigureOut">
               <a:rPr lang="en-US" smtClean="0"/>
-              <a:t>6/26/2025</a:t>
+              <a:t>10/9/2025</a:t>
             </a:fld>
             <a:endParaRPr lang="en-US"/>
           </a:p>
@@ -2382,7 +2388,7 @@
           <a:p>
             <a:fld id="{3E102D2E-813C-461C-9963-687A650C48C0}" type="datetimeFigureOut">
               <a:rPr lang="en-US" smtClean="0"/>
-              <a:t>6/26/2025</a:t>
+              <a:t>10/9/2025</a:t>
             </a:fld>
             <a:endParaRPr lang="en-US"/>
           </a:p>
@@ -2670,7 +2676,7 @@
           <a:p>
             <a:fld id="{3E102D2E-813C-461C-9963-687A650C48C0}" type="datetimeFigureOut">
               <a:rPr lang="en-US" smtClean="0"/>
-              <a:t>6/26/2025</a:t>
+              <a:t>10/9/2025</a:t>
             </a:fld>
             <a:endParaRPr lang="en-US"/>
           </a:p>
@@ -2911,7 +2917,7 @@
           <a:p>
             <a:fld id="{3E102D2E-813C-461C-9963-687A650C48C0}" type="datetimeFigureOut">
               <a:rPr lang="en-US" smtClean="0"/>
-              <a:t>6/26/2025</a:t>
+              <a:t>10/9/2025</a:t>
             </a:fld>
             <a:endParaRPr lang="en-US"/>
           </a:p>
@@ -3349,7 +3355,7 @@
         <p:spPr>
           <a:xfrm>
             <a:off x="217714" y="255046"/>
-            <a:ext cx="11756571" cy="355354"/>
+            <a:ext cx="11756571" cy="698717"/>
           </a:xfrm>
           <a:prstGeom prst="rect">
             <a:avLst/>
@@ -3366,24 +3372,96 @@
               <a:lnSpc>
                 <a:spcPct val="150000"/>
               </a:lnSpc>
-              <a:buNone/>
             </a:pPr>
             <a:r>
-              <a:rPr kumimoji="0" lang="en-US" altLang="en-US" sz="1300" b="0" i="0" u="none" strike="noStrike" cap="none" normalizeH="0" baseline="0">
-                <a:ln>
-                  <a:noFill/>
-                </a:ln>
-                <a:solidFill>
-                  <a:schemeClr val="tx1"/>
-                </a:solidFill>
-                <a:effectLst/>
+              <a:rPr lang="az-Latn-AZ" altLang="en-US" sz="1400" b="1">
                 <a:latin typeface="Arial" panose="020B0604020202020204" pitchFamily="34" charset="0"/>
               </a:rPr>
-              <a:t>.</a:t>
-            </a:r>
-          </a:p>
-        </p:txBody>
-      </p:sp>
+              <a:t>Product</a:t>
+            </a:r>
+            <a:r>
+              <a:rPr lang="az-Latn-AZ" altLang="en-US" sz="1400">
+                <a:latin typeface="Arial" panose="020B0604020202020204" pitchFamily="34" charset="0"/>
+              </a:rPr>
+              <a:t> haqqında məlumatı onun üçün göndəririk ki, bu məhsulun variantının </a:t>
+            </a:r>
+            <a:r>
+              <a:rPr lang="az-Latn-AZ" altLang="en-US" sz="1400" b="1">
+                <a:latin typeface="Arial" panose="020B0604020202020204" pitchFamily="34" charset="0"/>
+              </a:rPr>
+              <a:t>item</a:t>
+            </a:r>
+            <a:r>
+              <a:rPr lang="az-Latn-AZ" altLang="en-US" sz="1400">
+                <a:latin typeface="Arial" panose="020B0604020202020204" pitchFamily="34" charset="0"/>
+              </a:rPr>
+              <a:t> -ı yaradıldıqdan sonra, `</a:t>
+            </a:r>
+            <a:r>
+              <a:rPr lang="en-US" sz="1400" b="1"/>
+              <a:t>products-variant-item.index</a:t>
+            </a:r>
+            <a:r>
+              <a:rPr lang="az-Latn-AZ" altLang="en-US" sz="1400">
+                <a:latin typeface="Arial" panose="020B0604020202020204" pitchFamily="34" charset="0"/>
+              </a:rPr>
+              <a:t>` səhifəsinə özümüzü yönləndirmək üçün həmin item -in hansı məhsula aid olduğunu bu </a:t>
+            </a:r>
+            <a:r>
+              <a:rPr lang="az-Latn-AZ" altLang="en-US" sz="1400" b="1">
+                <a:latin typeface="Arial" panose="020B0604020202020204" pitchFamily="34" charset="0"/>
+              </a:rPr>
+              <a:t>product identifikator </a:t>
+            </a:r>
+            <a:r>
+              <a:rPr lang="az-Latn-AZ" altLang="en-US" sz="1400">
+                <a:latin typeface="Arial" panose="020B0604020202020204" pitchFamily="34" charset="0"/>
+              </a:rPr>
+              <a:t>ilə təyin edə bilək. </a:t>
+            </a:r>
+            <a:endParaRPr kumimoji="0" lang="en-US" altLang="en-US" sz="1400" b="0" i="0" u="none" strike="noStrike" cap="none" normalizeH="0" baseline="0">
+              <a:ln>
+                <a:noFill/>
+              </a:ln>
+              <a:solidFill>
+                <a:schemeClr val="tx1"/>
+              </a:solidFill>
+              <a:effectLst/>
+              <a:latin typeface="Arial" panose="020B0604020202020204" pitchFamily="34" charset="0"/>
+            </a:endParaRPr>
+          </a:p>
+        </p:txBody>
+      </p:sp>
+      <p:pic>
+        <p:nvPicPr>
+          <p:cNvPr id="4" name="Picture 3">
+            <a:extLst>
+              <a:ext uri="{FF2B5EF4-FFF2-40B4-BE49-F238E27FC236}">
+                <a16:creationId xmlns:a16="http://schemas.microsoft.com/office/drawing/2014/main" id="{3F94E54D-5F52-A14B-D58A-406210E594B9}"/>
+              </a:ext>
+            </a:extLst>
+          </p:cNvPr>
+          <p:cNvPicPr>
+            <a:picLocks noChangeAspect="1"/>
+          </p:cNvPicPr>
+          <p:nvPr/>
+        </p:nvPicPr>
+        <p:blipFill>
+          <a:blip r:embed="rId2"/>
+          <a:stretch>
+            <a:fillRect/>
+          </a:stretch>
+        </p:blipFill>
+        <p:spPr>
+          <a:xfrm>
+            <a:off x="4925196" y="1708727"/>
+            <a:ext cx="7266804" cy="5149273"/>
+          </a:xfrm>
+          <a:prstGeom prst="rect">
+            <a:avLst/>
+          </a:prstGeom>
+        </p:spPr>
+      </p:pic>
     </p:spTree>
     <p:extLst>
       <p:ext uri="{BB962C8B-B14F-4D97-AF65-F5344CB8AC3E}">
@@ -3455,21 +3533,54 @@
               <a:buNone/>
             </a:pPr>
             <a:r>
-              <a:rPr kumimoji="0" lang="en-US" altLang="en-US" sz="1300" b="0" i="0" u="none" strike="noStrike" cap="none" normalizeH="0" baseline="0">
-                <a:ln>
-                  <a:noFill/>
-                </a:ln>
-                <a:solidFill>
-                  <a:schemeClr val="tx1"/>
-                </a:solidFill>
-                <a:effectLst/>
+              <a:rPr lang="en-US" altLang="en-US" sz="1300">
                 <a:latin typeface="Arial" panose="020B0604020202020204" pitchFamily="34" charset="0"/>
               </a:rPr>
-              <a:t>.</a:t>
-            </a:r>
-          </a:p>
-        </p:txBody>
-      </p:sp>
+              <a:t>resources\views\admin\product\product-variant-item\create.blade.php</a:t>
+            </a:r>
+            <a:endParaRPr kumimoji="0" lang="en-US" altLang="en-US" sz="1300" b="0" i="0" u="none" strike="noStrike" cap="none" normalizeH="0" baseline="0">
+              <a:ln>
+                <a:noFill/>
+              </a:ln>
+              <a:solidFill>
+                <a:schemeClr val="tx1"/>
+              </a:solidFill>
+              <a:effectLst/>
+              <a:latin typeface="Arial" panose="020B0604020202020204" pitchFamily="34" charset="0"/>
+            </a:endParaRPr>
+          </a:p>
+        </p:txBody>
+      </p:sp>
+      <p:pic>
+        <p:nvPicPr>
+          <p:cNvPr id="4" name="Picture 3">
+            <a:extLst>
+              <a:ext uri="{FF2B5EF4-FFF2-40B4-BE49-F238E27FC236}">
+                <a16:creationId xmlns:a16="http://schemas.microsoft.com/office/drawing/2014/main" id="{C312C253-5FEE-FEA6-CAC5-76EB03FF4DA5}"/>
+              </a:ext>
+            </a:extLst>
+          </p:cNvPr>
+          <p:cNvPicPr>
+            <a:picLocks noChangeAspect="1"/>
+          </p:cNvPicPr>
+          <p:nvPr/>
+        </p:nvPicPr>
+        <p:blipFill>
+          <a:blip r:embed="rId2"/>
+          <a:stretch>
+            <a:fillRect/>
+          </a:stretch>
+        </p:blipFill>
+        <p:spPr>
+          <a:xfrm>
+            <a:off x="6123159" y="2309"/>
+            <a:ext cx="6068841" cy="6858000"/>
+          </a:xfrm>
+          <a:prstGeom prst="rect">
+            <a:avLst/>
+          </a:prstGeom>
+        </p:spPr>
+      </p:pic>
     </p:spTree>
     <p:extLst>
       <p:ext uri="{BB962C8B-B14F-4D97-AF65-F5344CB8AC3E}">
@@ -3484,6 +3595,256 @@
 </file>
 
 <file path=ppt/slides/slide3.xml><?xml version="1.0" encoding="utf-8"?>
+<p:sld xmlns:a="http://schemas.openxmlformats.org/drawingml/2006/main" xmlns:r="http://schemas.openxmlformats.org/officeDocument/2006/relationships" xmlns:p="http://schemas.openxmlformats.org/presentationml/2006/main">
+  <p:cSld>
+    <p:spTree>
+      <p:nvGrpSpPr>
+        <p:cNvPr id="1" name="">
+          <a:extLst>
+            <a:ext uri="{FF2B5EF4-FFF2-40B4-BE49-F238E27FC236}">
+              <a16:creationId xmlns:a16="http://schemas.microsoft.com/office/drawing/2014/main" id="{D2AB5C91-5B1E-4E22-F9D8-FB4BB8684BFE}"/>
+            </a:ext>
+          </a:extLst>
+        </p:cNvPr>
+        <p:cNvGrpSpPr/>
+        <p:nvPr/>
+      </p:nvGrpSpPr>
+      <p:grpSpPr>
+        <a:xfrm>
+          <a:off x="0" y="0"/>
+          <a:ext cx="0" cy="0"/>
+          <a:chOff x="0" y="0"/>
+          <a:chExt cx="0" cy="0"/>
+        </a:xfrm>
+      </p:grpSpPr>
+      <p:sp>
+        <p:nvSpPr>
+          <p:cNvPr id="3" name="TextBox 2">
+            <a:extLst>
+              <a:ext uri="{FF2B5EF4-FFF2-40B4-BE49-F238E27FC236}">
+                <a16:creationId xmlns:a16="http://schemas.microsoft.com/office/drawing/2014/main" id="{13D5D97F-EB88-205E-BEA4-8E569E2A1258}"/>
+              </a:ext>
+            </a:extLst>
+          </p:cNvPr>
+          <p:cNvSpPr txBox="1"/>
+          <p:nvPr/>
+        </p:nvSpPr>
+        <p:spPr>
+          <a:xfrm>
+            <a:off x="217714" y="255046"/>
+            <a:ext cx="11756571" cy="355354"/>
+          </a:xfrm>
+          <a:prstGeom prst="rect">
+            <a:avLst/>
+          </a:prstGeom>
+          <a:noFill/>
+        </p:spPr>
+        <p:txBody>
+          <a:bodyPr wrap="square">
+            <a:spAutoFit/>
+          </a:bodyPr>
+          <a:lstStyle/>
+          <a:p>
+            <a:pPr>
+              <a:lnSpc>
+                <a:spcPct val="150000"/>
+              </a:lnSpc>
+              <a:buNone/>
+            </a:pPr>
+            <a:r>
+              <a:rPr lang="en-US" altLang="en-US" sz="1300">
+                <a:latin typeface="Arial" panose="020B0604020202020204" pitchFamily="34" charset="0"/>
+              </a:rPr>
+              <a:t>resources\views\admin\product\product-variant-item\create.blade.php</a:t>
+            </a:r>
+            <a:endParaRPr kumimoji="0" lang="en-US" altLang="en-US" sz="1300" b="0" i="0" u="none" strike="noStrike" cap="none" normalizeH="0" baseline="0">
+              <a:ln>
+                <a:noFill/>
+              </a:ln>
+              <a:solidFill>
+                <a:schemeClr val="tx1"/>
+              </a:solidFill>
+              <a:effectLst/>
+              <a:latin typeface="Arial" panose="020B0604020202020204" pitchFamily="34" charset="0"/>
+            </a:endParaRPr>
+          </a:p>
+        </p:txBody>
+      </p:sp>
+      <p:pic>
+        <p:nvPicPr>
+          <p:cNvPr id="4" name="Picture 3">
+            <a:extLst>
+              <a:ext uri="{FF2B5EF4-FFF2-40B4-BE49-F238E27FC236}">
+                <a16:creationId xmlns:a16="http://schemas.microsoft.com/office/drawing/2014/main" id="{703DDA37-4FC7-CDAA-A022-17AD67DACB02}"/>
+              </a:ext>
+            </a:extLst>
+          </p:cNvPr>
+          <p:cNvPicPr>
+            <a:picLocks noChangeAspect="1"/>
+          </p:cNvPicPr>
+          <p:nvPr/>
+        </p:nvPicPr>
+        <p:blipFill>
+          <a:blip r:embed="rId2"/>
+          <a:stretch>
+            <a:fillRect/>
+          </a:stretch>
+        </p:blipFill>
+        <p:spPr>
+          <a:xfrm>
+            <a:off x="7405116" y="0"/>
+            <a:ext cx="4786884" cy="6858000"/>
+          </a:xfrm>
+          <a:prstGeom prst="rect">
+            <a:avLst/>
+          </a:prstGeom>
+        </p:spPr>
+      </p:pic>
+    </p:spTree>
+    <p:extLst>
+      <p:ext uri="{BB962C8B-B14F-4D97-AF65-F5344CB8AC3E}">
+        <p14:creationId xmlns:p14="http://schemas.microsoft.com/office/powerpoint/2010/main" val="3522566340"/>
+      </p:ext>
+    </p:extLst>
+  </p:cSld>
+  <p:clrMapOvr>
+    <a:masterClrMapping/>
+  </p:clrMapOvr>
+</p:sld>
+</file>
+
+<file path=ppt/slides/slide4.xml><?xml version="1.0" encoding="utf-8"?>
+<p:sld xmlns:a="http://schemas.openxmlformats.org/drawingml/2006/main" xmlns:r="http://schemas.openxmlformats.org/officeDocument/2006/relationships" xmlns:p="http://schemas.openxmlformats.org/presentationml/2006/main">
+  <p:cSld>
+    <p:spTree>
+      <p:nvGrpSpPr>
+        <p:cNvPr id="1" name="">
+          <a:extLst>
+            <a:ext uri="{FF2B5EF4-FFF2-40B4-BE49-F238E27FC236}">
+              <a16:creationId xmlns:a16="http://schemas.microsoft.com/office/drawing/2014/main" id="{44E7FF87-9BD8-42BC-F5AA-BBE73C20DF44}"/>
+            </a:ext>
+          </a:extLst>
+        </p:cNvPr>
+        <p:cNvGrpSpPr/>
+        <p:nvPr/>
+      </p:nvGrpSpPr>
+      <p:grpSpPr>
+        <a:xfrm>
+          <a:off x="0" y="0"/>
+          <a:ext cx="0" cy="0"/>
+          <a:chOff x="0" y="0"/>
+          <a:chExt cx="0" cy="0"/>
+        </a:xfrm>
+      </p:grpSpPr>
+      <p:sp>
+        <p:nvSpPr>
+          <p:cNvPr id="3" name="TextBox 2">
+            <a:extLst>
+              <a:ext uri="{FF2B5EF4-FFF2-40B4-BE49-F238E27FC236}">
+                <a16:creationId xmlns:a16="http://schemas.microsoft.com/office/drawing/2014/main" id="{A92295EF-5582-425D-D339-80C5923C66B7}"/>
+              </a:ext>
+            </a:extLst>
+          </p:cNvPr>
+          <p:cNvSpPr txBox="1"/>
+          <p:nvPr/>
+        </p:nvSpPr>
+        <p:spPr>
+          <a:xfrm>
+            <a:off x="217714" y="255046"/>
+            <a:ext cx="11756571" cy="355354"/>
+          </a:xfrm>
+          <a:prstGeom prst="rect">
+            <a:avLst/>
+          </a:prstGeom>
+          <a:noFill/>
+        </p:spPr>
+        <p:txBody>
+          <a:bodyPr wrap="square">
+            <a:spAutoFit/>
+          </a:bodyPr>
+          <a:lstStyle/>
+          <a:p>
+            <a:pPr>
+              <a:lnSpc>
+                <a:spcPct val="150000"/>
+              </a:lnSpc>
+              <a:buNone/>
+            </a:pPr>
+            <a:r>
+              <a:rPr lang="en-US" altLang="en-US" sz="1300">
+                <a:latin typeface="Arial" panose="020B0604020202020204" pitchFamily="34" charset="0"/>
+              </a:rPr>
+              <a:t>database\migrations\2025_10_09_060254_create_</a:t>
+            </a:r>
+            <a:r>
+              <a:rPr lang="en-US" altLang="en-US" sz="1300" b="1" i="1">
+                <a:latin typeface="Arial" panose="020B0604020202020204" pitchFamily="34" charset="0"/>
+              </a:rPr>
+              <a:t>product_variant_item_controllers</a:t>
+            </a:r>
+            <a:r>
+              <a:rPr lang="en-US" altLang="en-US" sz="1300">
+                <a:latin typeface="Arial" panose="020B0604020202020204" pitchFamily="34" charset="0"/>
+              </a:rPr>
+              <a:t>_table.php</a:t>
+            </a:r>
+            <a:endParaRPr kumimoji="0" lang="en-US" altLang="en-US" sz="1300" b="0" i="0" u="none" strike="noStrike" cap="none" normalizeH="0" baseline="0">
+              <a:ln>
+                <a:noFill/>
+              </a:ln>
+              <a:solidFill>
+                <a:schemeClr val="tx1"/>
+              </a:solidFill>
+              <a:effectLst/>
+              <a:latin typeface="Arial" panose="020B0604020202020204" pitchFamily="34" charset="0"/>
+            </a:endParaRPr>
+          </a:p>
+        </p:txBody>
+      </p:sp>
+      <p:pic>
+        <p:nvPicPr>
+          <p:cNvPr id="4" name="Picture 3">
+            <a:extLst>
+              <a:ext uri="{FF2B5EF4-FFF2-40B4-BE49-F238E27FC236}">
+                <a16:creationId xmlns:a16="http://schemas.microsoft.com/office/drawing/2014/main" id="{4A10092B-38FC-09BD-7490-0D5390DFAEC3}"/>
+              </a:ext>
+            </a:extLst>
+          </p:cNvPr>
+          <p:cNvPicPr>
+            <a:picLocks noChangeAspect="1"/>
+          </p:cNvPicPr>
+          <p:nvPr/>
+        </p:nvPicPr>
+        <p:blipFill>
+          <a:blip r:embed="rId2"/>
+          <a:stretch>
+            <a:fillRect/>
+          </a:stretch>
+        </p:blipFill>
+        <p:spPr>
+          <a:xfrm>
+            <a:off x="5116945" y="799718"/>
+            <a:ext cx="7075055" cy="6058281"/>
+          </a:xfrm>
+          <a:prstGeom prst="rect">
+            <a:avLst/>
+          </a:prstGeom>
+        </p:spPr>
+      </p:pic>
+    </p:spTree>
+    <p:extLst>
+      <p:ext uri="{BB962C8B-B14F-4D97-AF65-F5344CB8AC3E}">
+        <p14:creationId xmlns:p14="http://schemas.microsoft.com/office/powerpoint/2010/main" val="2807498132"/>
+      </p:ext>
+    </p:extLst>
+  </p:cSld>
+  <p:clrMapOvr>
+    <a:masterClrMapping/>
+  </p:clrMapOvr>
+</p:sld>
+</file>
+
+<file path=ppt/slides/slide5.xml><?xml version="1.0" encoding="utf-8"?>
 <p:sld xmlns:a="http://schemas.openxmlformats.org/drawingml/2006/main" xmlns:r="http://schemas.openxmlformats.org/officeDocument/2006/relationships" xmlns:p="http://schemas.openxmlformats.org/presentationml/2006/main">
   <p:cSld>
     <p:spTree>
@@ -3520,6 +3881,780 @@
         </p:nvSpPr>
         <p:spPr>
           <a:xfrm>
+            <a:off x="217715" y="255046"/>
+            <a:ext cx="4973122" cy="6056915"/>
+          </a:xfrm>
+          <a:prstGeom prst="rect">
+            <a:avLst/>
+          </a:prstGeom>
+          <a:noFill/>
+        </p:spPr>
+        <p:txBody>
+          <a:bodyPr wrap="square">
+            <a:spAutoFit/>
+          </a:bodyPr>
+          <a:lstStyle/>
+          <a:p>
+            <a:pPr>
+              <a:lnSpc>
+                <a:spcPct val="150000"/>
+              </a:lnSpc>
+              <a:buNone/>
+            </a:pPr>
+            <a:r>
+              <a:rPr lang="en-US" altLang="en-US" sz="1300">
+                <a:latin typeface="Arial" panose="020B0604020202020204" pitchFamily="34" charset="0"/>
+              </a:rPr>
+              <a:t>app\Http\Controllers\Backend\ProductVariantItemController.php</a:t>
+            </a:r>
+            <a:endParaRPr lang="az-Latn-AZ" altLang="en-US" sz="1300">
+              <a:latin typeface="Arial" panose="020B0604020202020204" pitchFamily="34" charset="0"/>
+            </a:endParaRPr>
+          </a:p>
+          <a:p>
+            <a:pPr>
+              <a:lnSpc>
+                <a:spcPct val="150000"/>
+              </a:lnSpc>
+              <a:buNone/>
+            </a:pPr>
+            <a:endParaRPr kumimoji="0" lang="az-Latn-AZ" altLang="en-US" sz="1300" b="0" i="0" u="none" strike="noStrike" cap="none" normalizeH="0" baseline="0">
+              <a:ln>
+                <a:noFill/>
+              </a:ln>
+              <a:solidFill>
+                <a:schemeClr val="tx1"/>
+              </a:solidFill>
+              <a:effectLst/>
+              <a:latin typeface="Arial" panose="020B0604020202020204" pitchFamily="34" charset="0"/>
+            </a:endParaRPr>
+          </a:p>
+          <a:p>
+            <a:pPr>
+              <a:lnSpc>
+                <a:spcPct val="150000"/>
+              </a:lnSpc>
+              <a:buNone/>
+            </a:pPr>
+            <a:r>
+              <a:rPr lang="en-US" altLang="en-US" sz="1300">
+                <a:latin typeface="Arial" panose="020B0604020202020204" pitchFamily="34" charset="0"/>
+              </a:rPr>
+              <a:t>Bu kodda </a:t>
+            </a:r>
+            <a:r>
+              <a:rPr lang="en-US" altLang="en-US" sz="1300" b="1">
+                <a:latin typeface="Arial" panose="020B0604020202020204" pitchFamily="34" charset="0"/>
+              </a:rPr>
+              <a:t>route() </a:t>
+            </a:r>
+            <a:r>
+              <a:rPr lang="en-US" altLang="en-US" sz="1300">
+                <a:latin typeface="Arial" panose="020B0604020202020204" pitchFamily="34" charset="0"/>
+              </a:rPr>
+              <a:t>metodu, istifadəçini müəyyən bir URL-ə yönləndirmək üçün istifadə edilir. </a:t>
+            </a:r>
+            <a:endParaRPr lang="az-Latn-AZ" altLang="en-US" sz="1300">
+              <a:latin typeface="Arial" panose="020B0604020202020204" pitchFamily="34" charset="0"/>
+            </a:endParaRPr>
+          </a:p>
+          <a:p>
+            <a:pPr>
+              <a:lnSpc>
+                <a:spcPct val="150000"/>
+              </a:lnSpc>
+              <a:buNone/>
+            </a:pPr>
+            <a:endParaRPr lang="az-Latn-AZ" altLang="en-US" sz="1300">
+              <a:latin typeface="Arial" panose="020B0604020202020204" pitchFamily="34" charset="0"/>
+            </a:endParaRPr>
+          </a:p>
+          <a:p>
+            <a:pPr>
+              <a:lnSpc>
+                <a:spcPct val="150000"/>
+              </a:lnSpc>
+              <a:buNone/>
+            </a:pPr>
+            <a:r>
+              <a:rPr lang="en-US" altLang="en-US" sz="1300">
+                <a:latin typeface="Arial" panose="020B0604020202020204" pitchFamily="34" charset="0"/>
+              </a:rPr>
+              <a:t>Burada</a:t>
+            </a:r>
+            <a:r>
+              <a:rPr lang="en-US" altLang="en-US" sz="1300" b="1" i="1">
+                <a:latin typeface="Arial" panose="020B0604020202020204" pitchFamily="34" charset="0"/>
+              </a:rPr>
+              <a:t> 'productId' =&gt; $request-&gt;product_id </a:t>
+            </a:r>
+            <a:r>
+              <a:rPr lang="en-US" altLang="en-US" sz="1300">
+                <a:latin typeface="Arial" panose="020B0604020202020204" pitchFamily="34" charset="0"/>
+              </a:rPr>
+              <a:t>və</a:t>
+            </a:r>
+            <a:endParaRPr lang="az-Latn-AZ" altLang="en-US" sz="1300">
+              <a:latin typeface="Arial" panose="020B0604020202020204" pitchFamily="34" charset="0"/>
+            </a:endParaRPr>
+          </a:p>
+          <a:p>
+            <a:pPr>
+              <a:lnSpc>
+                <a:spcPct val="150000"/>
+              </a:lnSpc>
+              <a:buNone/>
+            </a:pPr>
+            <a:r>
+              <a:rPr lang="en-US" altLang="en-US" sz="1300">
+                <a:latin typeface="Arial" panose="020B0604020202020204" pitchFamily="34" charset="0"/>
+              </a:rPr>
+              <a:t> </a:t>
+            </a:r>
+            <a:r>
+              <a:rPr lang="en-US" altLang="en-US" sz="1300" b="1" i="1">
+                <a:latin typeface="Arial" panose="020B0604020202020204" pitchFamily="34" charset="0"/>
+              </a:rPr>
+              <a:t>'variantId' =&gt; $request-&gt;variant_id </a:t>
+            </a:r>
+            <a:r>
+              <a:rPr lang="en-US" altLang="en-US" sz="1300">
+                <a:latin typeface="Arial" panose="020B0604020202020204" pitchFamily="34" charset="0"/>
+              </a:rPr>
+              <a:t>hissələri URL-ə əlavə ediləcək dinamik parametrik məlumatları təyin edir.</a:t>
+            </a:r>
+            <a:endParaRPr lang="az-Latn-AZ" altLang="en-US" sz="1300">
+              <a:latin typeface="Arial" panose="020B0604020202020204" pitchFamily="34" charset="0"/>
+            </a:endParaRPr>
+          </a:p>
+          <a:p>
+            <a:pPr>
+              <a:lnSpc>
+                <a:spcPct val="150000"/>
+              </a:lnSpc>
+              <a:buNone/>
+            </a:pPr>
+            <a:endParaRPr kumimoji="0" lang="az-Latn-AZ" altLang="en-US" sz="1300" b="0" i="0" u="none" strike="noStrike" cap="none" normalizeH="0" baseline="0">
+              <a:ln>
+                <a:noFill/>
+              </a:ln>
+              <a:solidFill>
+                <a:schemeClr val="tx1"/>
+              </a:solidFill>
+              <a:effectLst/>
+              <a:latin typeface="Arial" panose="020B0604020202020204" pitchFamily="34" charset="0"/>
+            </a:endParaRPr>
+          </a:p>
+          <a:p>
+            <a:pPr>
+              <a:lnSpc>
+                <a:spcPct val="150000"/>
+              </a:lnSpc>
+              <a:buNone/>
+            </a:pPr>
+            <a:endParaRPr lang="az-Latn-AZ" altLang="en-US" sz="1300">
+              <a:latin typeface="Arial" panose="020B0604020202020204" pitchFamily="34" charset="0"/>
+            </a:endParaRPr>
+          </a:p>
+          <a:p>
+            <a:pPr>
+              <a:lnSpc>
+                <a:spcPct val="150000"/>
+              </a:lnSpc>
+              <a:buNone/>
+            </a:pPr>
+            <a:endParaRPr kumimoji="0" lang="az-Latn-AZ" altLang="en-US" sz="1300" b="0" i="0" u="none" strike="noStrike" cap="none" normalizeH="0" baseline="0">
+              <a:ln>
+                <a:noFill/>
+              </a:ln>
+              <a:solidFill>
+                <a:schemeClr val="tx1"/>
+              </a:solidFill>
+              <a:effectLst/>
+              <a:latin typeface="Arial" panose="020B0604020202020204" pitchFamily="34" charset="0"/>
+            </a:endParaRPr>
+          </a:p>
+          <a:p>
+            <a:pPr>
+              <a:lnSpc>
+                <a:spcPct val="150000"/>
+              </a:lnSpc>
+              <a:buNone/>
+            </a:pPr>
+            <a:endParaRPr lang="az-Latn-AZ" altLang="en-US" sz="1300">
+              <a:latin typeface="Arial" panose="020B0604020202020204" pitchFamily="34" charset="0"/>
+            </a:endParaRPr>
+          </a:p>
+          <a:p>
+            <a:pPr>
+              <a:lnSpc>
+                <a:spcPct val="150000"/>
+              </a:lnSpc>
+              <a:buNone/>
+            </a:pPr>
+            <a:endParaRPr kumimoji="0" lang="az-Latn-AZ" altLang="en-US" sz="1300" b="0" i="0" u="none" strike="noStrike" cap="none" normalizeH="0" baseline="0">
+              <a:ln>
+                <a:noFill/>
+              </a:ln>
+              <a:solidFill>
+                <a:schemeClr val="tx1"/>
+              </a:solidFill>
+              <a:effectLst/>
+              <a:latin typeface="Arial" panose="020B0604020202020204" pitchFamily="34" charset="0"/>
+            </a:endParaRPr>
+          </a:p>
+          <a:p>
+            <a:pPr>
+              <a:lnSpc>
+                <a:spcPct val="150000"/>
+              </a:lnSpc>
+              <a:buNone/>
+            </a:pPr>
+            <a:r>
+              <a:rPr lang="en-US" altLang="en-US" sz="1300">
+                <a:latin typeface="Arial" panose="020B0604020202020204" pitchFamily="34" charset="0"/>
+              </a:rPr>
+              <a:t>Bu kod yönləndirmə əməliyyatı ilə əlaqəli olduğu üçün, </a:t>
+            </a:r>
+            <a:r>
+              <a:rPr lang="en-US" altLang="en-US" sz="1300" b="1">
+                <a:latin typeface="Arial" panose="020B0604020202020204" pitchFamily="34" charset="0"/>
+              </a:rPr>
+              <a:t>productId</a:t>
+            </a:r>
+            <a:r>
+              <a:rPr lang="en-US" altLang="en-US" sz="1300">
+                <a:latin typeface="Arial" panose="020B0604020202020204" pitchFamily="34" charset="0"/>
+              </a:rPr>
+              <a:t> və </a:t>
+            </a:r>
+            <a:r>
+              <a:rPr lang="en-US" altLang="en-US" sz="1300" b="1">
+                <a:latin typeface="Arial" panose="020B0604020202020204" pitchFamily="34" charset="0"/>
+              </a:rPr>
+              <a:t>variantId</a:t>
+            </a:r>
+            <a:r>
+              <a:rPr lang="en-US" altLang="en-US" sz="1300">
+                <a:latin typeface="Arial" panose="020B0604020202020204" pitchFamily="34" charset="0"/>
+              </a:rPr>
+              <a:t> parametrləri hansı səhifəyə yönləndiriləcəyini və oradakı məzmunu göstərəcək. Bu parametrlər URL-dən alınaraq istifadə edilə bilər, məsələn, həmin səhifədə göstərilən məhsul və variant məlumatlarını seçmək üçün.</a:t>
+            </a:r>
+            <a:endParaRPr lang="az-Latn-AZ" altLang="en-US" sz="1300">
+              <a:latin typeface="Arial" panose="020B0604020202020204" pitchFamily="34" charset="0"/>
+            </a:endParaRPr>
+          </a:p>
+          <a:p>
+            <a:pPr>
+              <a:lnSpc>
+                <a:spcPct val="150000"/>
+              </a:lnSpc>
+              <a:buNone/>
+            </a:pPr>
+            <a:endParaRPr kumimoji="0" lang="en-US" altLang="en-US" sz="1300" b="0" i="0" u="none" strike="noStrike" cap="none" normalizeH="0" baseline="0">
+              <a:ln>
+                <a:noFill/>
+              </a:ln>
+              <a:solidFill>
+                <a:schemeClr val="tx1"/>
+              </a:solidFill>
+              <a:effectLst/>
+              <a:latin typeface="Arial" panose="020B0604020202020204" pitchFamily="34" charset="0"/>
+            </a:endParaRPr>
+          </a:p>
+        </p:txBody>
+      </p:sp>
+      <p:pic>
+        <p:nvPicPr>
+          <p:cNvPr id="4" name="Picture 3">
+            <a:extLst>
+              <a:ext uri="{FF2B5EF4-FFF2-40B4-BE49-F238E27FC236}">
+                <a16:creationId xmlns:a16="http://schemas.microsoft.com/office/drawing/2014/main" id="{0BED4777-4BD4-E7BF-8EA9-4F1C8561FE73}"/>
+              </a:ext>
+            </a:extLst>
+          </p:cNvPr>
+          <p:cNvPicPr>
+            <a:picLocks noChangeAspect="1"/>
+          </p:cNvPicPr>
+          <p:nvPr/>
+        </p:nvPicPr>
+        <p:blipFill>
+          <a:blip r:embed="rId2"/>
+          <a:stretch>
+            <a:fillRect/>
+          </a:stretch>
+        </p:blipFill>
+        <p:spPr>
+          <a:xfrm>
+            <a:off x="5406632" y="877454"/>
+            <a:ext cx="6785367" cy="5980545"/>
+          </a:xfrm>
+          <a:prstGeom prst="rect">
+            <a:avLst/>
+          </a:prstGeom>
+        </p:spPr>
+      </p:pic>
+      <p:pic>
+        <p:nvPicPr>
+          <p:cNvPr id="6" name="Picture 5">
+            <a:extLst>
+              <a:ext uri="{FF2B5EF4-FFF2-40B4-BE49-F238E27FC236}">
+                <a16:creationId xmlns:a16="http://schemas.microsoft.com/office/drawing/2014/main" id="{0693D3E9-AE02-5570-1D60-A639EF79D79E}"/>
+              </a:ext>
+            </a:extLst>
+          </p:cNvPr>
+          <p:cNvPicPr>
+            <a:picLocks noChangeAspect="1"/>
+          </p:cNvPicPr>
+          <p:nvPr/>
+        </p:nvPicPr>
+        <p:blipFill>
+          <a:blip r:embed="rId3"/>
+          <a:stretch>
+            <a:fillRect/>
+          </a:stretch>
+        </p:blipFill>
+        <p:spPr>
+          <a:xfrm>
+            <a:off x="0" y="3169345"/>
+            <a:ext cx="4486901" cy="371527"/>
+          </a:xfrm>
+          <a:prstGeom prst="rect">
+            <a:avLst/>
+          </a:prstGeom>
+        </p:spPr>
+      </p:pic>
+    </p:spTree>
+    <p:extLst>
+      <p:ext uri="{BB962C8B-B14F-4D97-AF65-F5344CB8AC3E}">
+        <p14:creationId xmlns:p14="http://schemas.microsoft.com/office/powerpoint/2010/main" val="3095838342"/>
+      </p:ext>
+    </p:extLst>
+  </p:cSld>
+  <p:clrMapOvr>
+    <a:masterClrMapping/>
+  </p:clrMapOvr>
+</p:sld>
+</file>
+
+<file path=ppt/slides/slide6.xml><?xml version="1.0" encoding="utf-8"?>
+<p:sld xmlns:a="http://schemas.openxmlformats.org/drawingml/2006/main" xmlns:r="http://schemas.openxmlformats.org/officeDocument/2006/relationships" xmlns:p="http://schemas.openxmlformats.org/presentationml/2006/main">
+  <p:cSld>
+    <p:spTree>
+      <p:nvGrpSpPr>
+        <p:cNvPr id="1" name="">
+          <a:extLst>
+            <a:ext uri="{FF2B5EF4-FFF2-40B4-BE49-F238E27FC236}">
+              <a16:creationId xmlns:a16="http://schemas.microsoft.com/office/drawing/2014/main" id="{57A5864F-75BE-A4DF-6235-FF65F7B15918}"/>
+            </a:ext>
+          </a:extLst>
+        </p:cNvPr>
+        <p:cNvGrpSpPr/>
+        <p:nvPr/>
+      </p:nvGrpSpPr>
+      <p:grpSpPr>
+        <a:xfrm>
+          <a:off x="0" y="0"/>
+          <a:ext cx="0" cy="0"/>
+          <a:chOff x="0" y="0"/>
+          <a:chExt cx="0" cy="0"/>
+        </a:xfrm>
+      </p:grpSpPr>
+      <p:sp>
+        <p:nvSpPr>
+          <p:cNvPr id="3" name="TextBox 2">
+            <a:extLst>
+              <a:ext uri="{FF2B5EF4-FFF2-40B4-BE49-F238E27FC236}">
+                <a16:creationId xmlns:a16="http://schemas.microsoft.com/office/drawing/2014/main" id="{98E92D80-E370-40F8-B502-48E9A62E5644}"/>
+              </a:ext>
+            </a:extLst>
+          </p:cNvPr>
+          <p:cNvSpPr txBox="1"/>
+          <p:nvPr/>
+        </p:nvSpPr>
+        <p:spPr>
+          <a:xfrm>
+            <a:off x="217714" y="255046"/>
+            <a:ext cx="11756571" cy="355354"/>
+          </a:xfrm>
+          <a:prstGeom prst="rect">
+            <a:avLst/>
+          </a:prstGeom>
+          <a:noFill/>
+        </p:spPr>
+        <p:txBody>
+          <a:bodyPr wrap="square">
+            <a:spAutoFit/>
+          </a:bodyPr>
+          <a:lstStyle/>
+          <a:p>
+            <a:pPr>
+              <a:lnSpc>
+                <a:spcPct val="150000"/>
+              </a:lnSpc>
+              <a:buNone/>
+            </a:pPr>
+            <a:r>
+              <a:rPr lang="az-Latn-AZ" altLang="en-US" sz="1300">
+                <a:latin typeface="Arial" panose="020B0604020202020204" pitchFamily="34" charset="0"/>
+              </a:rPr>
+              <a:t>Data yoxdur.</a:t>
+            </a:r>
+            <a:endParaRPr kumimoji="0" lang="en-US" altLang="en-US" sz="1300" b="0" i="0" u="none" strike="noStrike" cap="none" normalizeH="0" baseline="0">
+              <a:ln>
+                <a:noFill/>
+              </a:ln>
+              <a:solidFill>
+                <a:schemeClr val="tx1"/>
+              </a:solidFill>
+              <a:effectLst/>
+              <a:latin typeface="Arial" panose="020B0604020202020204" pitchFamily="34" charset="0"/>
+            </a:endParaRPr>
+          </a:p>
+        </p:txBody>
+      </p:sp>
+      <p:pic>
+        <p:nvPicPr>
+          <p:cNvPr id="4" name="Picture 3">
+            <a:extLst>
+              <a:ext uri="{FF2B5EF4-FFF2-40B4-BE49-F238E27FC236}">
+                <a16:creationId xmlns:a16="http://schemas.microsoft.com/office/drawing/2014/main" id="{8E6C9D2F-A47A-C350-5038-AC07B166507F}"/>
+              </a:ext>
+            </a:extLst>
+          </p:cNvPr>
+          <p:cNvPicPr>
+            <a:picLocks noChangeAspect="1"/>
+          </p:cNvPicPr>
+          <p:nvPr/>
+        </p:nvPicPr>
+        <p:blipFill>
+          <a:blip r:embed="rId2"/>
+          <a:stretch>
+            <a:fillRect/>
+          </a:stretch>
+        </p:blipFill>
+        <p:spPr>
+          <a:xfrm>
+            <a:off x="0" y="1660840"/>
+            <a:ext cx="12192000" cy="3536319"/>
+          </a:xfrm>
+          <a:prstGeom prst="rect">
+            <a:avLst/>
+          </a:prstGeom>
+          <a:ln>
+            <a:noFill/>
+          </a:ln>
+          <a:effectLst>
+            <a:outerShdw blurRad="292100" dist="139700" dir="2700000" algn="tl" rotWithShape="0">
+              <a:srgbClr val="333333">
+                <a:alpha val="65000"/>
+              </a:srgbClr>
+            </a:outerShdw>
+          </a:effectLst>
+        </p:spPr>
+      </p:pic>
+    </p:spTree>
+    <p:extLst>
+      <p:ext uri="{BB962C8B-B14F-4D97-AF65-F5344CB8AC3E}">
+        <p14:creationId xmlns:p14="http://schemas.microsoft.com/office/powerpoint/2010/main" val="1069707576"/>
+      </p:ext>
+    </p:extLst>
+  </p:cSld>
+  <p:clrMapOvr>
+    <a:masterClrMapping/>
+  </p:clrMapOvr>
+</p:sld>
+</file>
+
+<file path=ppt/slides/slide7.xml><?xml version="1.0" encoding="utf-8"?>
+<p:sld xmlns:a="http://schemas.openxmlformats.org/drawingml/2006/main" xmlns:r="http://schemas.openxmlformats.org/officeDocument/2006/relationships" xmlns:p="http://schemas.openxmlformats.org/presentationml/2006/main">
+  <p:cSld>
+    <p:spTree>
+      <p:nvGrpSpPr>
+        <p:cNvPr id="1" name="">
+          <a:extLst>
+            <a:ext uri="{FF2B5EF4-FFF2-40B4-BE49-F238E27FC236}">
+              <a16:creationId xmlns:a16="http://schemas.microsoft.com/office/drawing/2014/main" id="{04864137-A93A-27B2-73CF-3E8AC20F9F8E}"/>
+            </a:ext>
+          </a:extLst>
+        </p:cNvPr>
+        <p:cNvGrpSpPr/>
+        <p:nvPr/>
+      </p:nvGrpSpPr>
+      <p:grpSpPr>
+        <a:xfrm>
+          <a:off x="0" y="0"/>
+          <a:ext cx="0" cy="0"/>
+          <a:chOff x="0" y="0"/>
+          <a:chExt cx="0" cy="0"/>
+        </a:xfrm>
+      </p:grpSpPr>
+      <p:sp>
+        <p:nvSpPr>
+          <p:cNvPr id="3" name="TextBox 2">
+            <a:extLst>
+              <a:ext uri="{FF2B5EF4-FFF2-40B4-BE49-F238E27FC236}">
+                <a16:creationId xmlns:a16="http://schemas.microsoft.com/office/drawing/2014/main" id="{A792D64F-7422-9421-E9A1-43F843D277E8}"/>
+              </a:ext>
+            </a:extLst>
+          </p:cNvPr>
+          <p:cNvSpPr txBox="1"/>
+          <p:nvPr/>
+        </p:nvSpPr>
+        <p:spPr>
+          <a:xfrm>
+            <a:off x="217714" y="255046"/>
+            <a:ext cx="11756571" cy="355354"/>
+          </a:xfrm>
+          <a:prstGeom prst="rect">
+            <a:avLst/>
+          </a:prstGeom>
+          <a:noFill/>
+        </p:spPr>
+        <p:txBody>
+          <a:bodyPr wrap="square">
+            <a:spAutoFit/>
+          </a:bodyPr>
+          <a:lstStyle/>
+          <a:p>
+            <a:pPr>
+              <a:lnSpc>
+                <a:spcPct val="150000"/>
+              </a:lnSpc>
+              <a:buNone/>
+            </a:pPr>
+            <a:r>
+              <a:rPr lang="az-Latn-AZ" altLang="en-US" sz="1300">
+                <a:latin typeface="Arial" panose="020B0604020202020204" pitchFamily="34" charset="0"/>
+              </a:rPr>
+              <a:t>Əlavə edirik.</a:t>
+            </a:r>
+            <a:endParaRPr kumimoji="0" lang="en-US" altLang="en-US" sz="1300" b="0" i="0" u="none" strike="noStrike" cap="none" normalizeH="0" baseline="0">
+              <a:ln>
+                <a:noFill/>
+              </a:ln>
+              <a:solidFill>
+                <a:schemeClr val="tx1"/>
+              </a:solidFill>
+              <a:effectLst/>
+              <a:latin typeface="Arial" panose="020B0604020202020204" pitchFamily="34" charset="0"/>
+            </a:endParaRPr>
+          </a:p>
+        </p:txBody>
+      </p:sp>
+      <p:pic>
+        <p:nvPicPr>
+          <p:cNvPr id="6" name="Picture 5">
+            <a:extLst>
+              <a:ext uri="{FF2B5EF4-FFF2-40B4-BE49-F238E27FC236}">
+                <a16:creationId xmlns:a16="http://schemas.microsoft.com/office/drawing/2014/main" id="{1CB3C1FC-9E28-BB09-415E-F13DF8EEDFCF}"/>
+              </a:ext>
+            </a:extLst>
+          </p:cNvPr>
+          <p:cNvPicPr>
+            <a:picLocks noChangeAspect="1"/>
+          </p:cNvPicPr>
+          <p:nvPr/>
+        </p:nvPicPr>
+        <p:blipFill>
+          <a:blip r:embed="rId2"/>
+          <a:stretch>
+            <a:fillRect/>
+          </a:stretch>
+        </p:blipFill>
+        <p:spPr>
+          <a:xfrm>
+            <a:off x="7141176" y="0"/>
+            <a:ext cx="5050824" cy="6858000"/>
+          </a:xfrm>
+          <a:prstGeom prst="rect">
+            <a:avLst/>
+          </a:prstGeom>
+          <a:ln w="38100" cap="sq">
+            <a:solidFill>
+              <a:srgbClr val="000000"/>
+            </a:solidFill>
+            <a:prstDash val="solid"/>
+            <a:miter lim="800000"/>
+          </a:ln>
+          <a:effectLst>
+            <a:outerShdw blurRad="50800" dist="38100" dir="2700000" algn="tl" rotWithShape="0">
+              <a:srgbClr val="000000">
+                <a:alpha val="43000"/>
+              </a:srgbClr>
+            </a:outerShdw>
+          </a:effectLst>
+        </p:spPr>
+      </p:pic>
+    </p:spTree>
+    <p:extLst>
+      <p:ext uri="{BB962C8B-B14F-4D97-AF65-F5344CB8AC3E}">
+        <p14:creationId xmlns:p14="http://schemas.microsoft.com/office/powerpoint/2010/main" val="3898805125"/>
+      </p:ext>
+    </p:extLst>
+  </p:cSld>
+  <p:clrMapOvr>
+    <a:masterClrMapping/>
+  </p:clrMapOvr>
+</p:sld>
+</file>
+
+<file path=ppt/slides/slide8.xml><?xml version="1.0" encoding="utf-8"?>
+<p:sld xmlns:a="http://schemas.openxmlformats.org/drawingml/2006/main" xmlns:r="http://schemas.openxmlformats.org/officeDocument/2006/relationships" xmlns:p="http://schemas.openxmlformats.org/presentationml/2006/main">
+  <p:cSld>
+    <p:spTree>
+      <p:nvGrpSpPr>
+        <p:cNvPr id="1" name="">
+          <a:extLst>
+            <a:ext uri="{FF2B5EF4-FFF2-40B4-BE49-F238E27FC236}">
+              <a16:creationId xmlns:a16="http://schemas.microsoft.com/office/drawing/2014/main" id="{9CAF65AB-2E7A-0548-8EA7-686A7F370B57}"/>
+            </a:ext>
+          </a:extLst>
+        </p:cNvPr>
+        <p:cNvGrpSpPr/>
+        <p:nvPr/>
+      </p:nvGrpSpPr>
+      <p:grpSpPr>
+        <a:xfrm>
+          <a:off x="0" y="0"/>
+          <a:ext cx="0" cy="0"/>
+          <a:chOff x="0" y="0"/>
+          <a:chExt cx="0" cy="0"/>
+        </a:xfrm>
+      </p:grpSpPr>
+      <p:sp>
+        <p:nvSpPr>
+          <p:cNvPr id="3" name="TextBox 2">
+            <a:extLst>
+              <a:ext uri="{FF2B5EF4-FFF2-40B4-BE49-F238E27FC236}">
+                <a16:creationId xmlns:a16="http://schemas.microsoft.com/office/drawing/2014/main" id="{285478EF-C27E-5051-9C19-6050948684EF}"/>
+              </a:ext>
+            </a:extLst>
+          </p:cNvPr>
+          <p:cNvSpPr txBox="1"/>
+          <p:nvPr/>
+        </p:nvSpPr>
+        <p:spPr>
+          <a:xfrm>
+            <a:off x="217714" y="255046"/>
+            <a:ext cx="11756571" cy="355354"/>
+          </a:xfrm>
+          <a:prstGeom prst="rect">
+            <a:avLst/>
+          </a:prstGeom>
+          <a:noFill/>
+        </p:spPr>
+        <p:txBody>
+          <a:bodyPr wrap="square">
+            <a:spAutoFit/>
+          </a:bodyPr>
+          <a:lstStyle/>
+          <a:p>
+            <a:pPr>
+              <a:lnSpc>
+                <a:spcPct val="150000"/>
+              </a:lnSpc>
+              <a:buNone/>
+            </a:pPr>
+            <a:r>
+              <a:rPr lang="az-Latn-AZ" altLang="en-US" sz="1300">
+                <a:latin typeface="Arial" panose="020B0604020202020204" pitchFamily="34" charset="0"/>
+              </a:rPr>
+              <a:t>Nəticə</a:t>
+            </a:r>
+            <a:endParaRPr kumimoji="0" lang="en-US" altLang="en-US" sz="1300" b="0" i="0" u="none" strike="noStrike" cap="none" normalizeH="0" baseline="0">
+              <a:ln>
+                <a:noFill/>
+              </a:ln>
+              <a:solidFill>
+                <a:schemeClr val="tx1"/>
+              </a:solidFill>
+              <a:effectLst/>
+              <a:latin typeface="Arial" panose="020B0604020202020204" pitchFamily="34" charset="0"/>
+            </a:endParaRPr>
+          </a:p>
+        </p:txBody>
+      </p:sp>
+      <p:pic>
+        <p:nvPicPr>
+          <p:cNvPr id="4" name="Picture 3">
+            <a:extLst>
+              <a:ext uri="{FF2B5EF4-FFF2-40B4-BE49-F238E27FC236}">
+                <a16:creationId xmlns:a16="http://schemas.microsoft.com/office/drawing/2014/main" id="{F582D56A-6F01-860C-7800-579D5AFC68C6}"/>
+              </a:ext>
+            </a:extLst>
+          </p:cNvPr>
+          <p:cNvPicPr>
+            <a:picLocks noChangeAspect="1"/>
+          </p:cNvPicPr>
+          <p:nvPr/>
+        </p:nvPicPr>
+        <p:blipFill>
+          <a:blip r:embed="rId2"/>
+          <a:stretch>
+            <a:fillRect/>
+          </a:stretch>
+        </p:blipFill>
+        <p:spPr>
+          <a:xfrm>
+            <a:off x="0" y="2923657"/>
+            <a:ext cx="12192000" cy="3934343"/>
+          </a:xfrm>
+          <a:prstGeom prst="rect">
+            <a:avLst/>
+          </a:prstGeom>
+        </p:spPr>
+      </p:pic>
+    </p:spTree>
+    <p:extLst>
+      <p:ext uri="{BB962C8B-B14F-4D97-AF65-F5344CB8AC3E}">
+        <p14:creationId xmlns:p14="http://schemas.microsoft.com/office/powerpoint/2010/main" val="2893262240"/>
+      </p:ext>
+    </p:extLst>
+  </p:cSld>
+  <p:clrMapOvr>
+    <a:masterClrMapping/>
+  </p:clrMapOvr>
+</p:sld>
+</file>
+
+<file path=ppt/slides/slide9.xml><?xml version="1.0" encoding="utf-8"?>
+<p:sld xmlns:a="http://schemas.openxmlformats.org/drawingml/2006/main" xmlns:r="http://schemas.openxmlformats.org/officeDocument/2006/relationships" xmlns:p="http://schemas.openxmlformats.org/presentationml/2006/main">
+  <p:cSld>
+    <p:spTree>
+      <p:nvGrpSpPr>
+        <p:cNvPr id="1" name="">
+          <a:extLst>
+            <a:ext uri="{FF2B5EF4-FFF2-40B4-BE49-F238E27FC236}">
+              <a16:creationId xmlns:a16="http://schemas.microsoft.com/office/drawing/2014/main" id="{960C8B54-7E00-0AA2-583D-A6B625090589}"/>
+            </a:ext>
+          </a:extLst>
+        </p:cNvPr>
+        <p:cNvGrpSpPr/>
+        <p:nvPr/>
+      </p:nvGrpSpPr>
+      <p:grpSpPr>
+        <a:xfrm>
+          <a:off x="0" y="0"/>
+          <a:ext cx="0" cy="0"/>
+          <a:chOff x="0" y="0"/>
+          <a:chExt cx="0" cy="0"/>
+        </a:xfrm>
+      </p:grpSpPr>
+      <p:sp>
+        <p:nvSpPr>
+          <p:cNvPr id="3" name="TextBox 2">
+            <a:extLst>
+              <a:ext uri="{FF2B5EF4-FFF2-40B4-BE49-F238E27FC236}">
+                <a16:creationId xmlns:a16="http://schemas.microsoft.com/office/drawing/2014/main" id="{44C3FEB7-33D6-7097-F5EF-62478EFB17B7}"/>
+              </a:ext>
+            </a:extLst>
+          </p:cNvPr>
+          <p:cNvSpPr txBox="1"/>
+          <p:nvPr/>
+        </p:nvSpPr>
+        <p:spPr>
+          <a:xfrm>
             <a:off x="217714" y="255046"/>
             <a:ext cx="11756571" cy="355354"/>
           </a:xfrm>
@@ -3559,7 +4694,7 @@
     </p:spTree>
     <p:extLst>
       <p:ext uri="{BB962C8B-B14F-4D97-AF65-F5344CB8AC3E}">
-        <p14:creationId xmlns:p14="http://schemas.microsoft.com/office/powerpoint/2010/main" val="3095838342"/>
+        <p14:creationId xmlns:p14="http://schemas.microsoft.com/office/powerpoint/2010/main" val="2117077579"/>
       </p:ext>
     </p:extLst>
   </p:cSld>
